--- a/report/Geneva_Market_Brief_LinkedIn (main).pptx
+++ b/report/Geneva_Market_Brief_LinkedIn (main).pptx
@@ -304,7 +304,7 @@
           <a:p>
             <a:fld id="{5BCAD085-E8A6-8845-BD4E-CB4CCA059FC4}" type="datetimeFigureOut">
               <a:rPr lang="en-US" smtClean="0"/>
-              <a:t>8/18/2026</a:t>
+              <a:t>8/19/2026</a:t>
             </a:fld>
             <a:endParaRPr lang="en-US"/>
           </a:p>
@@ -472,7 +472,7 @@
           <a:p>
             <a:fld id="{5BCAD085-E8A6-8845-BD4E-CB4CCA059FC4}" type="datetimeFigureOut">
               <a:rPr lang="en-US" smtClean="0"/>
-              <a:t>8/18/2026</a:t>
+              <a:t>8/19/2026</a:t>
             </a:fld>
             <a:endParaRPr lang="en-US"/>
           </a:p>
@@ -650,7 +650,7 @@
           <a:p>
             <a:fld id="{5BCAD085-E8A6-8845-BD4E-CB4CCA059FC4}" type="datetimeFigureOut">
               <a:rPr lang="en-US" smtClean="0"/>
-              <a:t>8/18/2026</a:t>
+              <a:t>8/19/2026</a:t>
             </a:fld>
             <a:endParaRPr lang="en-US"/>
           </a:p>
@@ -818,7 +818,7 @@
           <a:p>
             <a:fld id="{5BCAD085-E8A6-8845-BD4E-CB4CCA059FC4}" type="datetimeFigureOut">
               <a:rPr lang="en-US" smtClean="0"/>
-              <a:t>8/18/2026</a:t>
+              <a:t>8/19/2026</a:t>
             </a:fld>
             <a:endParaRPr lang="en-US"/>
           </a:p>
@@ -1063,7 +1063,7 @@
           <a:p>
             <a:fld id="{5BCAD085-E8A6-8845-BD4E-CB4CCA059FC4}" type="datetimeFigureOut">
               <a:rPr lang="en-US" smtClean="0"/>
-              <a:t>8/18/2026</a:t>
+              <a:t>8/19/2026</a:t>
             </a:fld>
             <a:endParaRPr lang="en-US"/>
           </a:p>
@@ -1348,7 +1348,7 @@
           <a:p>
             <a:fld id="{5BCAD085-E8A6-8845-BD4E-CB4CCA059FC4}" type="datetimeFigureOut">
               <a:rPr lang="en-US" smtClean="0"/>
-              <a:t>8/18/2026</a:t>
+              <a:t>8/19/2026</a:t>
             </a:fld>
             <a:endParaRPr lang="en-US"/>
           </a:p>
@@ -1767,7 +1767,7 @@
           <a:p>
             <a:fld id="{5BCAD085-E8A6-8845-BD4E-CB4CCA059FC4}" type="datetimeFigureOut">
               <a:rPr lang="en-US" smtClean="0"/>
-              <a:t>8/18/2026</a:t>
+              <a:t>8/19/2026</a:t>
             </a:fld>
             <a:endParaRPr lang="en-US"/>
           </a:p>
@@ -1884,7 +1884,7 @@
           <a:p>
             <a:fld id="{5BCAD085-E8A6-8845-BD4E-CB4CCA059FC4}" type="datetimeFigureOut">
               <a:rPr lang="en-US" smtClean="0"/>
-              <a:t>8/18/2026</a:t>
+              <a:t>8/19/2026</a:t>
             </a:fld>
             <a:endParaRPr lang="en-US"/>
           </a:p>
@@ -1979,7 +1979,7 @@
           <a:p>
             <a:fld id="{5BCAD085-E8A6-8845-BD4E-CB4CCA059FC4}" type="datetimeFigureOut">
               <a:rPr lang="en-US" smtClean="0"/>
-              <a:t>8/18/2026</a:t>
+              <a:t>8/19/2026</a:t>
             </a:fld>
             <a:endParaRPr lang="en-US"/>
           </a:p>
@@ -2254,7 +2254,7 @@
           <a:p>
             <a:fld id="{5BCAD085-E8A6-8845-BD4E-CB4CCA059FC4}" type="datetimeFigureOut">
               <a:rPr lang="en-US" smtClean="0"/>
-              <a:t>8/18/2026</a:t>
+              <a:t>8/19/2026</a:t>
             </a:fld>
             <a:endParaRPr lang="en-US"/>
           </a:p>
@@ -2506,7 +2506,7 @@
           <a:p>
             <a:fld id="{5BCAD085-E8A6-8845-BD4E-CB4CCA059FC4}" type="datetimeFigureOut">
               <a:rPr lang="en-US" smtClean="0"/>
-              <a:t>8/18/2026</a:t>
+              <a:t>8/19/2026</a:t>
             </a:fld>
             <a:endParaRPr lang="en-US"/>
           </a:p>
@@ -2717,7 +2717,7 @@
           <a:p>
             <a:fld id="{5BCAD085-E8A6-8845-BD4E-CB4CCA059FC4}" type="datetimeFigureOut">
               <a:rPr lang="en-US" smtClean="0"/>
-              <a:t>8/18/2026</a:t>
+              <a:t>8/19/2026</a:t>
             </a:fld>
             <a:endParaRPr lang="en-US"/>
           </a:p>
@@ -3428,7 +3428,7 @@
         <p:spPr>
           <a:xfrm>
             <a:off x="432000" y="7128000"/>
-            <a:ext cx="9828000" cy="200055"/>
+            <a:ext cx="9828000" cy="215444"/>
           </a:xfrm>
           <a:prstGeom prst="rect">
             <a:avLst/>
@@ -3441,7 +3441,7 @@
           </a:bodyPr>
           <a:lstStyle/>
           <a:p>
-            <a:pPr algn="l">
+            <a:pPr>
               <a:defRPr sz="700" b="0" i="0">
                 <a:solidFill>
                   <a:srgbClr val="6B7280"/>
@@ -3453,6 +3453,27 @@
               <a:rPr dirty="0"/>
               <a:t>Source: OCSTAT T 05.05 · Official notarial transactions, Canton of Geneva · Author’s calculations</a:t>
             </a:r>
+            <a:r>
+              <a:rPr lang="ru-RU" dirty="0"/>
+              <a:t> </a:t>
+            </a:r>
+            <a:r>
+              <a:rPr lang="en-GB" dirty="0"/>
+              <a:t>· </a:t>
+            </a:r>
+            <a:r>
+              <a:rPr lang="en-GB" sz="800" dirty="0"/>
+              <a:t>Methodology and code:</a:t>
+            </a:r>
+            <a:r>
+              <a:rPr lang="ru-RU" sz="800" dirty="0"/>
+              <a:t> </a:t>
+            </a:r>
+            <a:r>
+              <a:rPr lang="en-GB" sz="800" dirty="0"/>
+              <a:t>https://github.com/slviktor/geneva-real-estate-market-analysis</a:t>
+            </a:r>
+            <a:endParaRPr dirty="0"/>
           </a:p>
         </p:txBody>
       </p:sp>
@@ -3878,7 +3899,7 @@
         <p:spPr>
           <a:xfrm>
             <a:off x="432000" y="7128000"/>
-            <a:ext cx="9828000" cy="180000"/>
+            <a:ext cx="9828000" cy="200055"/>
           </a:xfrm>
           <a:prstGeom prst="rect">
             <a:avLst/>
@@ -3891,7 +3912,7 @@
           </a:bodyPr>
           <a:lstStyle/>
           <a:p>
-            <a:pPr algn="l">
+            <a:pPr>
               <a:defRPr sz="700" b="0" i="0">
                 <a:solidFill>
                   <a:srgbClr val="6B7280"/>
@@ -3900,8 +3921,30 @@
               </a:defRPr>
             </a:pPr>
             <a:r>
+              <a:rPr dirty="0"/>
               <a:t>Source: OCSTAT T 05.05 · Official notarial transactions, Canton of Geneva · Author’s calculations</a:t>
             </a:r>
+            <a:r>
+              <a:rPr lang="ru-RU" dirty="0"/>
+              <a:t> </a:t>
+            </a:r>
+            <a:r>
+              <a:rPr lang="en-GB" dirty="0"/>
+              <a:t>· </a:t>
+            </a:r>
+            <a:r>
+              <a:rPr lang="en-GB" sz="700" dirty="0"/>
+              <a:t>Methodology and code:</a:t>
+            </a:r>
+            <a:r>
+              <a:rPr lang="ru-RU" sz="700" dirty="0"/>
+              <a:t> </a:t>
+            </a:r>
+            <a:r>
+              <a:rPr lang="en-GB" sz="700" dirty="0"/>
+              <a:t>https://github.com/slviktor/geneva-real-estate-market-analysis</a:t>
+            </a:r>
+            <a:endParaRPr dirty="0"/>
           </a:p>
         </p:txBody>
       </p:sp>
@@ -4369,7 +4412,7 @@
           </a:bodyPr>
           <a:lstStyle/>
           <a:p>
-            <a:pPr algn="l">
+            <a:pPr>
               <a:defRPr sz="700" b="0" i="0">
                 <a:solidFill>
                   <a:srgbClr val="6B7280"/>
@@ -4381,6 +4424,27 @@
               <a:rPr dirty="0"/>
               <a:t>Source: OCSTAT T 05.05 · Official notarial transactions, Canton of Geneva · Author’s calculations</a:t>
             </a:r>
+            <a:r>
+              <a:rPr lang="ru-RU" dirty="0"/>
+              <a:t> </a:t>
+            </a:r>
+            <a:r>
+              <a:rPr lang="en-GB" dirty="0"/>
+              <a:t>· </a:t>
+            </a:r>
+            <a:r>
+              <a:rPr lang="en-GB" sz="700" dirty="0"/>
+              <a:t>Methodology and code:</a:t>
+            </a:r>
+            <a:r>
+              <a:rPr lang="ru-RU" sz="700" dirty="0"/>
+              <a:t> </a:t>
+            </a:r>
+            <a:r>
+              <a:rPr lang="en-GB" sz="700" dirty="0"/>
+              <a:t>https://github.com/slviktor/geneva-real-estate-market-analysis</a:t>
+            </a:r>
+            <a:endParaRPr dirty="0"/>
           </a:p>
         </p:txBody>
       </p:sp>
